--- a/Experiencia de Aprendizaje 3 - Observabilidad, Segurida y etica de Agente de AI/Clase 3.4/Clase 3.4.pptx
+++ b/Experiencia de Aprendizaje 3 - Observabilidad, Segurida y etica de Agente de AI/Clase 3.4/Clase 3.4.pptx
@@ -5,7 +5,7 @@
     <p:sldMasterId id="2147483648" r:id="rId1"/>
   </p:sldMasterIdLst>
   <p:notesMasterIdLst>
-    <p:notesMasterId r:id="rId16"/>
+    <p:notesMasterId r:id="rId17"/>
   </p:notesMasterIdLst>
   <p:sldIdLst>
     <p:sldId id="256" r:id="rId2"/>
@@ -19,9 +19,10 @@
     <p:sldId id="323" r:id="rId10"/>
     <p:sldId id="324" r:id="rId11"/>
     <p:sldId id="325" r:id="rId12"/>
-    <p:sldId id="327" r:id="rId13"/>
-    <p:sldId id="326" r:id="rId14"/>
-    <p:sldId id="329" r:id="rId15"/>
+    <p:sldId id="331" r:id="rId13"/>
+    <p:sldId id="327" r:id="rId14"/>
+    <p:sldId id="326" r:id="rId15"/>
+    <p:sldId id="329" r:id="rId16"/>
   </p:sldIdLst>
   <p:sldSz cx="12192000" cy="6858000"/>
   <p:notesSz cx="6858000" cy="9144000"/>
@@ -222,7 +223,7 @@
           <a:p>
             <a:fld id="{87BDCB0C-69E9-4911-980B-989A824EA717}" type="datetimeFigureOut">
               <a:rPr lang="es-CL" smtClean="0"/>
-              <a:t>31-05-2026</a:t>
+              <a:t>02-06-2026</a:t>
             </a:fld>
             <a:endParaRPr lang="es-CL"/>
           </a:p>
@@ -498,6 +499,276 @@
         <p:cNvPr id="1" name="">
           <a:extLst>
             <a:ext uri="{FF2B5EF4-FFF2-40B4-BE49-F238E27FC236}">
+              <a16:creationId xmlns:a16="http://schemas.microsoft.com/office/drawing/2014/main" id="{A40A5AF6-B4C6-C968-D068-01E3B0A21475}"/>
+            </a:ext>
+          </a:extLst>
+        </p:cNvPr>
+        <p:cNvGrpSpPr/>
+        <p:nvPr/>
+      </p:nvGrpSpPr>
+      <p:grpSpPr>
+        <a:xfrm>
+          <a:off x="0" y="0"/>
+          <a:ext cx="0" cy="0"/>
+          <a:chOff x="0" y="0"/>
+          <a:chExt cx="0" cy="0"/>
+        </a:xfrm>
+      </p:grpSpPr>
+      <p:sp>
+        <p:nvSpPr>
+          <p:cNvPr id="2" name="Marcador de imagen de diapositiva 1">
+            <a:extLst>
+              <a:ext uri="{FF2B5EF4-FFF2-40B4-BE49-F238E27FC236}">
+                <a16:creationId xmlns:a16="http://schemas.microsoft.com/office/drawing/2014/main" id="{3697DAD7-8FE4-143F-0F5A-807B20FA2CB6}"/>
+              </a:ext>
+            </a:extLst>
+          </p:cNvPr>
+          <p:cNvSpPr>
+            <a:spLocks noGrp="1" noRot="1" noChangeAspect="1"/>
+          </p:cNvSpPr>
+          <p:nvPr>
+            <p:ph type="sldImg"/>
+          </p:nvPr>
+        </p:nvSpPr>
+        <p:spPr/>
+      </p:sp>
+      <p:sp>
+        <p:nvSpPr>
+          <p:cNvPr id="3" name="Marcador de notas 2">
+            <a:extLst>
+              <a:ext uri="{FF2B5EF4-FFF2-40B4-BE49-F238E27FC236}">
+                <a16:creationId xmlns:a16="http://schemas.microsoft.com/office/drawing/2014/main" id="{900C2D25-6BCC-221D-3DF5-9EEF76148326}"/>
+              </a:ext>
+            </a:extLst>
+          </p:cNvPr>
+          <p:cNvSpPr>
+            <a:spLocks noGrp="1"/>
+          </p:cNvSpPr>
+          <p:nvPr>
+            <p:ph type="body" idx="1"/>
+          </p:nvPr>
+        </p:nvSpPr>
+        <p:spPr/>
+        <p:txBody>
+          <a:bodyPr/>
+          <a:lstStyle/>
+          <a:p>
+            <a:pPr fontAlgn="base"/>
+            <a:r>
+              <a:rPr lang="en-US" sz="1200" b="0" i="0" kern="1200" dirty="0">
+                <a:solidFill>
+                  <a:schemeClr val="tx1"/>
+                </a:solidFill>
+                <a:effectLst/>
+                <a:latin typeface="+mn-lt"/>
+                <a:ea typeface="+mn-ea"/>
+                <a:cs typeface="+mn-cs"/>
+              </a:rPr>
+              <a:t>Model distillation suggests that it’s possible to capture a large model’s behaviors using fewer parameters. Could it be that within the large model, there exists a subset of parameters capable of capturing the entire model’s behavior? This is the core concept behind pruning.</a:t>
+            </a:r>
+          </a:p>
+          <a:p>
+            <a:pPr fontAlgn="base"/>
+            <a:r>
+              <a:rPr lang="en-US" sz="1200" b="0" i="0" kern="1200" dirty="0">
+                <a:solidFill>
+                  <a:schemeClr val="tx1"/>
+                </a:solidFill>
+                <a:effectLst/>
+                <a:latin typeface="+mn-lt"/>
+                <a:ea typeface="+mn-ea"/>
+                <a:cs typeface="+mn-cs"/>
+              </a:rPr>
+              <a:t>Pruning, in the context of neural networks, has two meanings. One is to remove entire nodes of a neural network, which means changing its architecture and reducing its number of parameters. Another is to find parameters least useful to predictions and set them to zero. In this case, pruning doesn’t reduce the total number of parameters, only the number of non-zero parameters. This makes the model more sparse, which both reduces the model’s storage space and speeds up computation.</a:t>
+            </a:r>
+          </a:p>
+          <a:p>
+            <a:pPr fontAlgn="base"/>
+            <a:r>
+              <a:rPr lang="en-US" sz="1200" b="0" i="0" kern="1200" dirty="0">
+                <a:solidFill>
+                  <a:schemeClr val="tx1"/>
+                </a:solidFill>
+                <a:effectLst/>
+                <a:latin typeface="+mn-lt"/>
+                <a:ea typeface="+mn-ea"/>
+                <a:cs typeface="+mn-cs"/>
+              </a:rPr>
+              <a:t>Pruned models can be used as-is or be further finetuned to adjust the remaining parameters and restore any performance degradation caused by the pruning process. Pruning can help discover promising model architectures (</a:t>
+            </a:r>
+            <a:r>
+              <a:rPr lang="en-US" sz="1200" b="0" i="0" u="sng" kern="1200" dirty="0">
+                <a:solidFill>
+                  <a:schemeClr val="tx1"/>
+                </a:solidFill>
+                <a:effectLst/>
+                <a:latin typeface="+mn-lt"/>
+                <a:ea typeface="+mn-ea"/>
+                <a:cs typeface="+mn-cs"/>
+                <a:hlinkClick r:id="rId3"/>
+              </a:rPr>
+              <a:t>Liu et al., 2018</a:t>
+            </a:r>
+            <a:r>
+              <a:rPr lang="en-US" sz="1200" b="0" i="0" kern="1200" dirty="0">
+                <a:solidFill>
+                  <a:schemeClr val="tx1"/>
+                </a:solidFill>
+                <a:effectLst/>
+                <a:latin typeface="+mn-lt"/>
+                <a:ea typeface="+mn-ea"/>
+                <a:cs typeface="+mn-cs"/>
+              </a:rPr>
+              <a:t>). These pruned architectures, smaller than the pre-pruned architectures, can also be trained from scratch (</a:t>
+            </a:r>
+            <a:r>
+              <a:rPr lang="en-US" sz="1200" b="0" i="0" u="sng" kern="1200" dirty="0">
+                <a:solidFill>
+                  <a:schemeClr val="tx1"/>
+                </a:solidFill>
+                <a:effectLst/>
+                <a:latin typeface="+mn-lt"/>
+                <a:ea typeface="+mn-ea"/>
+                <a:cs typeface="+mn-cs"/>
+                <a:hlinkClick r:id="rId4"/>
+              </a:rPr>
+              <a:t>Zhu et al., 2017</a:t>
+            </a:r>
+            <a:r>
+              <a:rPr lang="en-US" sz="1200" b="0" i="0" kern="1200" dirty="0">
+                <a:solidFill>
+                  <a:schemeClr val="tx1"/>
+                </a:solidFill>
+                <a:effectLst/>
+                <a:latin typeface="+mn-lt"/>
+                <a:ea typeface="+mn-ea"/>
+                <a:cs typeface="+mn-cs"/>
+              </a:rPr>
+              <a:t>).</a:t>
+            </a:r>
+          </a:p>
+          <a:p>
+            <a:pPr fontAlgn="base"/>
+            <a:r>
+              <a:rPr lang="en-US" sz="1200" b="0" i="0" kern="1200" dirty="0">
+                <a:solidFill>
+                  <a:schemeClr val="tx1"/>
+                </a:solidFill>
+                <a:effectLst/>
+                <a:latin typeface="+mn-lt"/>
+                <a:ea typeface="+mn-ea"/>
+                <a:cs typeface="+mn-cs"/>
+              </a:rPr>
+              <a:t>In the literature, there have been many encouraging pruning results. For example, </a:t>
+            </a:r>
+            <a:r>
+              <a:rPr lang="en-US" sz="1200" b="0" i="0" u="sng" kern="1200" dirty="0">
+                <a:solidFill>
+                  <a:schemeClr val="tx1"/>
+                </a:solidFill>
+                <a:effectLst/>
+                <a:latin typeface="+mn-lt"/>
+                <a:ea typeface="+mn-ea"/>
+                <a:cs typeface="+mn-cs"/>
+                <a:hlinkClick r:id="rId5"/>
+              </a:rPr>
+              <a:t>Frankle and Carbin (2019)</a:t>
+            </a:r>
+            <a:r>
+              <a:rPr lang="en-US" sz="1200" b="0" i="0" kern="1200" dirty="0">
+                <a:solidFill>
+                  <a:schemeClr val="tx1"/>
+                </a:solidFill>
+                <a:effectLst/>
+                <a:latin typeface="+mn-lt"/>
+                <a:ea typeface="+mn-ea"/>
+                <a:cs typeface="+mn-cs"/>
+              </a:rPr>
+              <a:t> showed that pruning techniques can reduce the non-zero parameter counts of certain trained networks by over 90%, decreasing memory footprints and improving speed without compromising accuracy. However, in practice, as of this writing, pruning is less common. It’s harder to do, as it requires an understanding of the original model’s architecture, and the performance boost it can bring is often much less than that of other approaches. Pruning also results in sparse models, and not all hardware architectures are designed to take advantage of the resulting sparsity.</a:t>
+            </a:r>
+          </a:p>
+          <a:p>
+            <a:pPr fontAlgn="base"/>
+            <a:r>
+              <a:rPr lang="en-US" sz="1200" b="0" i="1" kern="1200" dirty="0">
+                <a:solidFill>
+                  <a:schemeClr val="tx1"/>
+                </a:solidFill>
+                <a:effectLst/>
+                <a:latin typeface="+mn-lt"/>
+                <a:ea typeface="+mn-ea"/>
+                <a:cs typeface="+mn-cs"/>
+              </a:rPr>
+              <a:t>Weight-only quantization is by far the most popular approach since it’s easy to use, works out of the box for many models, and is extremely effective.</a:t>
+            </a:r>
+            <a:r>
+              <a:rPr lang="en-US" sz="1200" b="0" i="0" kern="1200" dirty="0">
+                <a:solidFill>
+                  <a:schemeClr val="tx1"/>
+                </a:solidFill>
+                <a:effectLst/>
+                <a:latin typeface="+mn-lt"/>
+                <a:ea typeface="+mn-ea"/>
+                <a:cs typeface="+mn-cs"/>
+              </a:rPr>
+              <a:t> Reducing a model’s precision from 32 bits to 16 bits reduces its memory footprint by half. However, we’re close to the limit of quantization—we can’t go lower than 1 bit per value. Distillation is also common because it can result in a smaller model whose behavior is comparative to that of a much larger one for your needs.</a:t>
+            </a:r>
+          </a:p>
+          <a:p>
+            <a:endParaRPr lang="es-CL" dirty="0"/>
+          </a:p>
+        </p:txBody>
+      </p:sp>
+      <p:sp>
+        <p:nvSpPr>
+          <p:cNvPr id="4" name="Marcador de número de diapositiva 3">
+            <a:extLst>
+              <a:ext uri="{FF2B5EF4-FFF2-40B4-BE49-F238E27FC236}">
+                <a16:creationId xmlns:a16="http://schemas.microsoft.com/office/drawing/2014/main" id="{F24BECEF-7A2F-11EE-566F-E59E5FD1BA05}"/>
+              </a:ext>
+            </a:extLst>
+          </p:cNvPr>
+          <p:cNvSpPr>
+            <a:spLocks noGrp="1"/>
+          </p:cNvSpPr>
+          <p:nvPr>
+            <p:ph type="sldNum" sz="quarter" idx="5"/>
+          </p:nvPr>
+        </p:nvSpPr>
+        <p:spPr/>
+        <p:txBody>
+          <a:bodyPr/>
+          <a:lstStyle/>
+          <a:p>
+            <a:fld id="{2107F482-7FF7-4DD4-AE91-ACA70D5B43D5}" type="slidenum">
+              <a:rPr lang="es-CL" smtClean="0"/>
+              <a:t>12</a:t>
+            </a:fld>
+            <a:endParaRPr lang="es-CL"/>
+          </a:p>
+        </p:txBody>
+      </p:sp>
+    </p:spTree>
+    <p:extLst>
+      <p:ext uri="{BB962C8B-B14F-4D97-AF65-F5344CB8AC3E}">
+        <p14:creationId xmlns:p14="http://schemas.microsoft.com/office/powerpoint/2010/main" val="4083460122"/>
+      </p:ext>
+    </p:extLst>
+  </p:cSld>
+  <p:clrMapOvr>
+    <a:masterClrMapping/>
+  </p:clrMapOvr>
+</p:notes>
+</file>
+
+<file path=ppt/notesSlides/notesSlide2.xml><?xml version="1.0" encoding="utf-8"?>
+<p:notes xmlns:a="http://schemas.openxmlformats.org/drawingml/2006/main" xmlns:r="http://schemas.openxmlformats.org/officeDocument/2006/relationships" xmlns:p="http://schemas.openxmlformats.org/presentationml/2006/main">
+  <p:cSld>
+    <p:spTree>
+      <p:nvGrpSpPr>
+        <p:cNvPr id="1" name="">
+          <a:extLst>
+            <a:ext uri="{FF2B5EF4-FFF2-40B4-BE49-F238E27FC236}">
               <a16:creationId xmlns:a16="http://schemas.microsoft.com/office/drawing/2014/main" id="{42FEE34B-418D-F1C8-39BD-21F18E22AAFF}"/>
             </a:ext>
           </a:extLst>
@@ -741,7 +1012,7 @@
           <a:p>
             <a:fld id="{2107F482-7FF7-4DD4-AE91-ACA70D5B43D5}" type="slidenum">
               <a:rPr lang="es-CL" smtClean="0"/>
-              <a:t>12</a:t>
+              <a:t>13</a:t>
             </a:fld>
             <a:endParaRPr lang="es-CL"/>
           </a:p>
@@ -760,7 +1031,7 @@
 </p:notes>
 </file>
 
-<file path=ppt/notesSlides/notesSlide2.xml><?xml version="1.0" encoding="utf-8"?>
+<file path=ppt/notesSlides/notesSlide3.xml><?xml version="1.0" encoding="utf-8"?>
 <p:notes xmlns:a="http://schemas.openxmlformats.org/drawingml/2006/main" xmlns:r="http://schemas.openxmlformats.org/officeDocument/2006/relationships" xmlns:p="http://schemas.openxmlformats.org/presentationml/2006/main">
   <p:cSld>
     <p:spTree>
@@ -987,7 +1258,7 @@
           <a:p>
             <a:fld id="{2107F482-7FF7-4DD4-AE91-ACA70D5B43D5}" type="slidenum">
               <a:rPr lang="es-CL" smtClean="0"/>
-              <a:t>13</a:t>
+              <a:t>14</a:t>
             </a:fld>
             <a:endParaRPr lang="es-CL"/>
           </a:p>
@@ -1006,7 +1277,7 @@
 </p:notes>
 </file>
 
-<file path=ppt/notesSlides/notesSlide3.xml><?xml version="1.0" encoding="utf-8"?>
+<file path=ppt/notesSlides/notesSlide4.xml><?xml version="1.0" encoding="utf-8"?>
 <p:notes xmlns:a="http://schemas.openxmlformats.org/drawingml/2006/main" xmlns:r="http://schemas.openxmlformats.org/officeDocument/2006/relationships" xmlns:p="http://schemas.openxmlformats.org/presentationml/2006/main">
   <p:cSld>
     <p:spTree>
@@ -1257,7 +1528,7 @@
           <a:p>
             <a:fld id="{2107F482-7FF7-4DD4-AE91-ACA70D5B43D5}" type="slidenum">
               <a:rPr lang="es-CL" smtClean="0"/>
-              <a:t>14</a:t>
+              <a:t>15</a:t>
             </a:fld>
             <a:endParaRPr lang="es-CL"/>
           </a:p>
@@ -1425,7 +1696,7 @@
           <a:p>
             <a:fld id="{E8BDA46D-A1A7-4D05-A86A-5A57D57622A5}" type="datetimeFigureOut">
               <a:rPr lang="es-CL" smtClean="0"/>
-              <a:t>31-05-2026</a:t>
+              <a:t>02-06-2026</a:t>
             </a:fld>
             <a:endParaRPr lang="es-CL"/>
           </a:p>
@@ -1625,7 +1896,7 @@
           <a:p>
             <a:fld id="{E8BDA46D-A1A7-4D05-A86A-5A57D57622A5}" type="datetimeFigureOut">
               <a:rPr lang="es-CL" smtClean="0"/>
-              <a:t>31-05-2026</a:t>
+              <a:t>02-06-2026</a:t>
             </a:fld>
             <a:endParaRPr lang="es-CL"/>
           </a:p>
@@ -1835,7 +2106,7 @@
           <a:p>
             <a:fld id="{E8BDA46D-A1A7-4D05-A86A-5A57D57622A5}" type="datetimeFigureOut">
               <a:rPr lang="es-CL" smtClean="0"/>
-              <a:t>31-05-2026</a:t>
+              <a:t>02-06-2026</a:t>
             </a:fld>
             <a:endParaRPr lang="es-CL"/>
           </a:p>
@@ -2035,7 +2306,7 @@
           <a:p>
             <a:fld id="{E8BDA46D-A1A7-4D05-A86A-5A57D57622A5}" type="datetimeFigureOut">
               <a:rPr lang="es-CL" smtClean="0"/>
-              <a:t>31-05-2026</a:t>
+              <a:t>02-06-2026</a:t>
             </a:fld>
             <a:endParaRPr lang="es-CL"/>
           </a:p>
@@ -2311,7 +2582,7 @@
           <a:p>
             <a:fld id="{E8BDA46D-A1A7-4D05-A86A-5A57D57622A5}" type="datetimeFigureOut">
               <a:rPr lang="es-CL" smtClean="0"/>
-              <a:t>31-05-2026</a:t>
+              <a:t>02-06-2026</a:t>
             </a:fld>
             <a:endParaRPr lang="es-CL"/>
           </a:p>
@@ -2579,7 +2850,7 @@
           <a:p>
             <a:fld id="{E8BDA46D-A1A7-4D05-A86A-5A57D57622A5}" type="datetimeFigureOut">
               <a:rPr lang="es-CL" smtClean="0"/>
-              <a:t>31-05-2026</a:t>
+              <a:t>02-06-2026</a:t>
             </a:fld>
             <a:endParaRPr lang="es-CL"/>
           </a:p>
@@ -2994,7 +3265,7 @@
           <a:p>
             <a:fld id="{E8BDA46D-A1A7-4D05-A86A-5A57D57622A5}" type="datetimeFigureOut">
               <a:rPr lang="es-CL" smtClean="0"/>
-              <a:t>31-05-2026</a:t>
+              <a:t>02-06-2026</a:t>
             </a:fld>
             <a:endParaRPr lang="es-CL"/>
           </a:p>
@@ -3136,7 +3407,7 @@
           <a:p>
             <a:fld id="{E8BDA46D-A1A7-4D05-A86A-5A57D57622A5}" type="datetimeFigureOut">
               <a:rPr lang="es-CL" smtClean="0"/>
-              <a:t>31-05-2026</a:t>
+              <a:t>02-06-2026</a:t>
             </a:fld>
             <a:endParaRPr lang="es-CL"/>
           </a:p>
@@ -3249,7 +3520,7 @@
           <a:p>
             <a:fld id="{E8BDA46D-A1A7-4D05-A86A-5A57D57622A5}" type="datetimeFigureOut">
               <a:rPr lang="es-CL" smtClean="0"/>
-              <a:t>31-05-2026</a:t>
+              <a:t>02-06-2026</a:t>
             </a:fld>
             <a:endParaRPr lang="es-CL"/>
           </a:p>
@@ -3562,7 +3833,7 @@
           <a:p>
             <a:fld id="{E8BDA46D-A1A7-4D05-A86A-5A57D57622A5}" type="datetimeFigureOut">
               <a:rPr lang="es-CL" smtClean="0"/>
-              <a:t>31-05-2026</a:t>
+              <a:t>02-06-2026</a:t>
             </a:fld>
             <a:endParaRPr lang="es-CL"/>
           </a:p>
@@ -3851,7 +4122,7 @@
           <a:p>
             <a:fld id="{E8BDA46D-A1A7-4D05-A86A-5A57D57622A5}" type="datetimeFigureOut">
               <a:rPr lang="es-CL" smtClean="0"/>
-              <a:t>31-05-2026</a:t>
+              <a:t>02-06-2026</a:t>
             </a:fld>
             <a:endParaRPr lang="es-CL"/>
           </a:p>
@@ -4094,7 +4365,7 @@
           <a:p>
             <a:fld id="{E8BDA46D-A1A7-4D05-A86A-5A57D57622A5}" type="datetimeFigureOut">
               <a:rPr lang="es-CL" smtClean="0"/>
-              <a:t>31-05-2026</a:t>
+              <a:t>02-06-2026</a:t>
             </a:fld>
             <a:endParaRPr lang="es-CL"/>
           </a:p>
@@ -5225,6 +5496,249 @@
         <p:cNvPr id="1" name="">
           <a:extLst>
             <a:ext uri="{FF2B5EF4-FFF2-40B4-BE49-F238E27FC236}">
+              <a16:creationId xmlns:a16="http://schemas.microsoft.com/office/drawing/2014/main" id="{1E8D4BB6-0368-1ECD-542A-ED67BB18FB29}"/>
+            </a:ext>
+          </a:extLst>
+        </p:cNvPr>
+        <p:cNvGrpSpPr/>
+        <p:nvPr/>
+      </p:nvGrpSpPr>
+      <p:grpSpPr>
+        <a:xfrm>
+          <a:off x="0" y="0"/>
+          <a:ext cx="0" cy="0"/>
+          <a:chOff x="0" y="0"/>
+          <a:chExt cx="0" cy="0"/>
+        </a:xfrm>
+      </p:grpSpPr>
+      <p:sp>
+        <p:nvSpPr>
+          <p:cNvPr id="2" name="Título 1">
+            <a:extLst>
+              <a:ext uri="{FF2B5EF4-FFF2-40B4-BE49-F238E27FC236}">
+                <a16:creationId xmlns:a16="http://schemas.microsoft.com/office/drawing/2014/main" id="{57323A2B-764E-7A0A-D003-ACE639374398}"/>
+              </a:ext>
+            </a:extLst>
+          </p:cNvPr>
+          <p:cNvSpPr>
+            <a:spLocks noGrp="1"/>
+          </p:cNvSpPr>
+          <p:nvPr>
+            <p:ph type="title"/>
+          </p:nvPr>
+        </p:nvSpPr>
+        <p:spPr>
+          <a:xfrm>
+            <a:off x="335833" y="67153"/>
+            <a:ext cx="10846393" cy="1577458"/>
+          </a:xfrm>
+        </p:spPr>
+        <p:txBody>
+          <a:bodyPr>
+            <a:normAutofit/>
+          </a:bodyPr>
+          <a:lstStyle/>
+          <a:p>
+            <a:r>
+              <a:rPr lang="es-MX" sz="3200" b="1" i="1" dirty="0"/>
+              <a:t>Optimización por modelamiento: </a:t>
+            </a:r>
+            <a:r>
+              <a:rPr lang="es-MX" sz="3200" i="1" dirty="0"/>
+              <a:t>Hazlo más pequeño.</a:t>
+            </a:r>
+            <a:endParaRPr lang="es-CL" sz="3200" i="1" dirty="0"/>
+          </a:p>
+        </p:txBody>
+      </p:sp>
+      <p:pic>
+        <p:nvPicPr>
+          <p:cNvPr id="4" name="Picture 2" descr="Duoc UC - Learn Chile">
+            <a:extLst>
+              <a:ext uri="{FF2B5EF4-FFF2-40B4-BE49-F238E27FC236}">
+                <a16:creationId xmlns:a16="http://schemas.microsoft.com/office/drawing/2014/main" id="{440BFE07-EECF-86B7-FDB3-3054EE739996}"/>
+              </a:ext>
+            </a:extLst>
+          </p:cNvPr>
+          <p:cNvPicPr>
+            <a:picLocks noChangeAspect="1" noChangeArrowheads="1"/>
+          </p:cNvPicPr>
+          <p:nvPr/>
+        </p:nvPicPr>
+        <p:blipFill>
+          <a:blip r:embed="rId3">
+            <a:extLst>
+              <a:ext uri="{28A0092B-C50C-407E-A947-70E740481C1C}">
+                <a14:useLocalDpi xmlns:a14="http://schemas.microsoft.com/office/drawing/2010/main" val="0"/>
+              </a:ext>
+            </a:extLst>
+          </a:blip>
+          <a:srcRect/>
+          <a:stretch>
+            <a:fillRect/>
+          </a:stretch>
+        </p:blipFill>
+        <p:spPr bwMode="auto">
+          <a:xfrm>
+            <a:off x="11135913" y="30480"/>
+            <a:ext cx="974807" cy="825402"/>
+          </a:xfrm>
+          <a:prstGeom prst="rect">
+            <a:avLst/>
+          </a:prstGeom>
+          <a:noFill/>
+          <a:extLst>
+            <a:ext uri="{909E8E84-426E-40DD-AFC4-6F175D3DCCD1}">
+              <a14:hiddenFill xmlns:a14="http://schemas.microsoft.com/office/drawing/2010/main">
+                <a:solidFill>
+                  <a:srgbClr val="FFFFFF"/>
+                </a:solidFill>
+              </a14:hiddenFill>
+            </a:ext>
+          </a:extLst>
+        </p:spPr>
+      </p:pic>
+      <p:sp>
+        <p:nvSpPr>
+          <p:cNvPr id="8" name="Rectángulo: esquinas redondeadas 7">
+            <a:extLst>
+              <a:ext uri="{FF2B5EF4-FFF2-40B4-BE49-F238E27FC236}">
+                <a16:creationId xmlns:a16="http://schemas.microsoft.com/office/drawing/2014/main" id="{0F9268A8-EC54-E5F7-5C1B-CFDA83CCB023}"/>
+              </a:ext>
+            </a:extLst>
+          </p:cNvPr>
+          <p:cNvSpPr/>
+          <p:nvPr/>
+        </p:nvSpPr>
+        <p:spPr>
+          <a:xfrm>
+            <a:off x="5293360" y="3002647"/>
+            <a:ext cx="914400" cy="344950"/>
+          </a:xfrm>
+          <a:prstGeom prst="roundRect">
+            <a:avLst/>
+          </a:prstGeom>
+          <a:noFill/>
+          <a:ln w="57150">
+            <a:solidFill>
+              <a:schemeClr val="accent1"/>
+            </a:solidFill>
+          </a:ln>
+        </p:spPr>
+        <p:style>
+          <a:lnRef idx="2">
+            <a:schemeClr val="accent1"/>
+          </a:lnRef>
+          <a:fillRef idx="1">
+            <a:schemeClr val="lt1"/>
+          </a:fillRef>
+          <a:effectRef idx="0">
+            <a:schemeClr val="accent1"/>
+          </a:effectRef>
+          <a:fontRef idx="minor">
+            <a:schemeClr val="dk1"/>
+          </a:fontRef>
+        </p:style>
+        <p:txBody>
+          <a:bodyPr rtlCol="0" anchor="ctr"/>
+          <a:lstStyle/>
+          <a:p>
+            <a:pPr algn="ctr"/>
+            <a:endParaRPr lang="es-CL"/>
+          </a:p>
+        </p:txBody>
+      </p:sp>
+      <p:sp>
+        <p:nvSpPr>
+          <p:cNvPr id="14" name="CuadroTexto 13">
+            <a:extLst>
+              <a:ext uri="{FF2B5EF4-FFF2-40B4-BE49-F238E27FC236}">
+                <a16:creationId xmlns:a16="http://schemas.microsoft.com/office/drawing/2014/main" id="{252B91FE-485C-6FE0-35AD-FC3072ECE5F5}"/>
+              </a:ext>
+            </a:extLst>
+          </p:cNvPr>
+          <p:cNvSpPr txBox="1"/>
+          <p:nvPr/>
+        </p:nvSpPr>
+        <p:spPr>
+          <a:xfrm>
+            <a:off x="648310" y="5947828"/>
+            <a:ext cx="10726434" cy="338554"/>
+          </a:xfrm>
+          <a:prstGeom prst="rect">
+            <a:avLst/>
+          </a:prstGeom>
+          <a:noFill/>
+        </p:spPr>
+        <p:txBody>
+          <a:bodyPr wrap="square">
+            <a:spAutoFit/>
+          </a:bodyPr>
+          <a:lstStyle/>
+          <a:p>
+            <a:r>
+              <a:rPr lang="es-MX" sz="1600" b="1" i="1" dirty="0"/>
+              <a:t>Nota</a:t>
+            </a:r>
+            <a:r>
+              <a:rPr lang="es-MX" sz="1600" i="1" dirty="0"/>
+              <a:t>: https://www.linkedin.com/pulse/fine-tuning-quantization-distillation-three-very-ways-alvin-kabwama-i47zc/.</a:t>
+            </a:r>
+            <a:endParaRPr lang="es-CL" sz="1600" i="1" dirty="0"/>
+          </a:p>
+        </p:txBody>
+      </p:sp>
+      <p:pic>
+        <p:nvPicPr>
+          <p:cNvPr id="5" name="Imagen 4">
+            <a:extLst>
+              <a:ext uri="{FF2B5EF4-FFF2-40B4-BE49-F238E27FC236}">
+                <a16:creationId xmlns:a16="http://schemas.microsoft.com/office/drawing/2014/main" id="{E46E5EA7-2236-378D-17AB-00CDEAA1B5C8}"/>
+              </a:ext>
+            </a:extLst>
+          </p:cNvPr>
+          <p:cNvPicPr>
+            <a:picLocks noChangeAspect="1"/>
+          </p:cNvPicPr>
+          <p:nvPr/>
+        </p:nvPicPr>
+        <p:blipFill>
+          <a:blip r:embed="rId4"/>
+          <a:stretch>
+            <a:fillRect/>
+          </a:stretch>
+        </p:blipFill>
+        <p:spPr>
+          <a:xfrm>
+            <a:off x="2184858" y="1391494"/>
+            <a:ext cx="7653337" cy="4310674"/>
+          </a:xfrm>
+          <a:prstGeom prst="rect">
+            <a:avLst/>
+          </a:prstGeom>
+        </p:spPr>
+      </p:pic>
+    </p:spTree>
+    <p:extLst>
+      <p:ext uri="{BB962C8B-B14F-4D97-AF65-F5344CB8AC3E}">
+        <p14:creationId xmlns:p14="http://schemas.microsoft.com/office/powerpoint/2010/main" val="962375877"/>
+      </p:ext>
+    </p:extLst>
+  </p:cSld>
+  <p:clrMapOvr>
+    <a:masterClrMapping/>
+  </p:clrMapOvr>
+</p:sld>
+</file>
+
+<file path=ppt/slides/slide13.xml><?xml version="1.0" encoding="utf-8"?>
+<p:sld xmlns:a="http://schemas.openxmlformats.org/drawingml/2006/main" xmlns:r="http://schemas.openxmlformats.org/officeDocument/2006/relationships" xmlns:p="http://schemas.openxmlformats.org/presentationml/2006/main">
+  <p:cSld>
+    <p:spTree>
+      <p:nvGrpSpPr>
+        <p:cNvPr id="1" name="">
+          <a:extLst>
+            <a:ext uri="{FF2B5EF4-FFF2-40B4-BE49-F238E27FC236}">
               <a16:creationId xmlns:a16="http://schemas.microsoft.com/office/drawing/2014/main" id="{9819BDF3-DC2C-F255-B374-22972D27084B}"/>
             </a:ext>
           </a:extLst>
@@ -5399,7 +5913,7 @@
         </p:blipFill>
         <p:spPr>
           <a:xfrm>
-            <a:off x="817256" y="1375819"/>
+            <a:off x="929016" y="1321561"/>
             <a:ext cx="10557488" cy="4160587"/>
           </a:xfrm>
           <a:prstGeom prst="rect">
@@ -5489,7 +6003,7 @@
 </p:sld>
 </file>
 
-<file path=ppt/slides/slide13.xml><?xml version="1.0" encoding="utf-8"?>
+<file path=ppt/slides/slide14.xml><?xml version="1.0" encoding="utf-8"?>
 <p:sld xmlns:a="http://schemas.openxmlformats.org/drawingml/2006/main" xmlns:r="http://schemas.openxmlformats.org/officeDocument/2006/relationships" xmlns:p="http://schemas.openxmlformats.org/presentationml/2006/main">
   <p:cSld>
     <p:spTree>
@@ -5756,7 +6270,7 @@
         </p:blipFill>
         <p:spPr>
           <a:xfrm>
-            <a:off x="335833" y="1574135"/>
+            <a:off x="263022" y="1416778"/>
             <a:ext cx="5496007" cy="3516688"/>
           </a:xfrm>
           <a:prstGeom prst="rect">
@@ -5786,7 +6300,7 @@
         </p:blipFill>
         <p:spPr>
           <a:xfrm>
-            <a:off x="5750560" y="1795700"/>
+            <a:off x="5750560" y="1644611"/>
             <a:ext cx="5988358" cy="3375740"/>
           </a:xfrm>
           <a:prstGeom prst="rect">
@@ -5807,7 +6321,7 @@
 </p:sld>
 </file>
 
-<file path=ppt/slides/slide14.xml><?xml version="1.0" encoding="utf-8"?>
+<file path=ppt/slides/slide15.xml><?xml version="1.0" encoding="utf-8"?>
 <p:sld xmlns:a="http://schemas.openxmlformats.org/drawingml/2006/main" xmlns:r="http://schemas.openxmlformats.org/officeDocument/2006/relationships" xmlns:p="http://schemas.openxmlformats.org/presentationml/2006/main">
   <p:cSld>
     <p:spTree>
